--- a/Ola-Customer-Retention-Analysis.pptx
+++ b/Ola-Customer-Retention-Analysis.pptx
@@ -23,19 +23,21 @@
     <p:embeddedFont>
       <p:font typeface="DM Sans" pitchFamily="2" charset="0"/>
       <p:regular r:id="rId13"/>
-      <p:boldItalic r:id="rId14"/>
+      <p:bold r:id="rId14"/>
+      <p:italic r:id="rId15"/>
+      <p:boldItalic r:id="rId16"/>
     </p:embeddedFont>
     <p:embeddedFont>
       <p:font typeface="Merriweather" panose="00000500000000000000" pitchFamily="2" charset="0"/>
-      <p:regular r:id="rId15"/>
+      <p:regular r:id="rId17"/>
     </p:embeddedFont>
     <p:embeddedFont>
-      <p:font typeface="Merriweather Bold" panose="020B0604020202020204" charset="0"/>
-      <p:regular r:id="rId16"/>
+      <p:font typeface="Merriweather Bold" panose="00000800000000000000" charset="0"/>
+      <p:regular r:id="rId18"/>
     </p:embeddedFont>
     <p:embeddedFont>
       <p:font typeface="Montserrat Bold" panose="020B0604020202020204" charset="0"/>
-      <p:regular r:id="rId17"/>
+      <p:regular r:id="rId19"/>
     </p:embeddedFont>
   </p:embeddedFontLst>
   <p:defaultTextStyle>
@@ -152,37 +154,45 @@
 </p:presentation>
 </file>
 
+<file path=ppt/revisionInfo.xml><?xml version="1.0" encoding="utf-8"?>
+<p1510:revInfo xmlns:a="http://schemas.openxmlformats.org/drawingml/2006/main" xmlns:r="http://schemas.openxmlformats.org/officeDocument/2006/relationships" xmlns:p1510="http://schemas.microsoft.com/office/powerpoint/2015/10/main">
+  <p1510:revLst>
+    <p1510:client id="{69DEC4E9-746C-4B2C-8B48-5B4439DB3BAC}" v="1" dt="2026-07-16T19:37:35.976"/>
+  </p1510:revLst>
+</p1510:revInfo>
+</file>
+
 <file path=ppt/changesInfos/changesInfo1.xml><?xml version="1.0" encoding="utf-8"?>
 <pc:chgInfo xmlns:a="http://schemas.openxmlformats.org/drawingml/2006/main" xmlns:r="http://schemas.openxmlformats.org/officeDocument/2006/relationships" xmlns:ac="http://schemas.microsoft.com/office/drawing/2013/main/command" xmlns:pc="http://schemas.microsoft.com/office/powerpoint/2013/main/command">
   <pc:docChgLst>
     <pc:chgData name="Rudra Pathade" userId="ecabf40330bb97c1" providerId="LiveId" clId="{00CAB3AB-F496-422B-9574-D424CA26E857}"/>
     <pc:docChg chg="undo custSel modSld">
-      <pc:chgData name="Rudra Pathade" userId="ecabf40330bb97c1" providerId="LiveId" clId="{00CAB3AB-F496-422B-9574-D424CA26E857}" dt="2026-07-16T19:00:51.299" v="14" actId="14100"/>
+      <pc:chgData name="Rudra Pathade" userId="ecabf40330bb97c1" providerId="LiveId" clId="{00CAB3AB-F496-422B-9574-D424CA26E857}" dt="2026-07-16T19:41:48.434" v="319" actId="113"/>
       <pc:docMkLst>
         <pc:docMk/>
       </pc:docMkLst>
       <pc:sldChg chg="addSp modSp mod">
-        <pc:chgData name="Rudra Pathade" userId="ecabf40330bb97c1" providerId="LiveId" clId="{00CAB3AB-F496-422B-9574-D424CA26E857}" dt="2026-07-16T19:00:51.299" v="14" actId="14100"/>
+        <pc:chgData name="Rudra Pathade" userId="ecabf40330bb97c1" providerId="LiveId" clId="{00CAB3AB-F496-422B-9574-D424CA26E857}" dt="2026-07-16T19:41:48.434" v="319" actId="113"/>
         <pc:sldMkLst>
           <pc:docMk/>
-          <pc:sldMk cId="0" sldId="262"/>
+          <pc:sldMk cId="0" sldId="256"/>
         </pc:sldMkLst>
+        <pc:spChg chg="add mod">
+          <ac:chgData name="Rudra Pathade" userId="ecabf40330bb97c1" providerId="LiveId" clId="{00CAB3AB-F496-422B-9574-D424CA26E857}" dt="2026-07-16T19:41:48.434" v="319" actId="113"/>
+          <ac:spMkLst>
+            <pc:docMk/>
+            <pc:sldMk cId="0" sldId="256"/>
+            <ac:spMk id="19" creationId="{12FAE6BB-41E7-3A17-F80C-50200757230E}"/>
+          </ac:spMkLst>
+        </pc:spChg>
         <pc:grpChg chg="mod">
-          <ac:chgData name="Rudra Pathade" userId="ecabf40330bb97c1" providerId="LiveId" clId="{00CAB3AB-F496-422B-9574-D424CA26E857}" dt="2026-07-16T19:00:40.068" v="13" actId="1038"/>
+          <ac:chgData name="Rudra Pathade" userId="ecabf40330bb97c1" providerId="LiveId" clId="{00CAB3AB-F496-422B-9574-D424CA26E857}" dt="2026-07-16T19:41:47.078" v="318" actId="1038"/>
           <ac:grpSpMkLst>
             <pc:docMk/>
-            <pc:sldMk cId="0" sldId="262"/>
+            <pc:sldMk cId="0" sldId="256"/>
             <ac:grpSpMk id="4" creationId="{00000000-0000-0000-0000-000000000000}"/>
           </ac:grpSpMkLst>
         </pc:grpChg>
-        <pc:picChg chg="add mod">
-          <ac:chgData name="Rudra Pathade" userId="ecabf40330bb97c1" providerId="LiveId" clId="{00CAB3AB-F496-422B-9574-D424CA26E857}" dt="2026-07-16T19:00:51.299" v="14" actId="14100"/>
-          <ac:picMkLst>
-            <pc:docMk/>
-            <pc:sldMk cId="0" sldId="262"/>
-            <ac:picMk id="30" creationId="{6C53DCA9-393A-0F19-4ACC-04354EFED3C4}"/>
-          </ac:picMkLst>
-        </pc:picChg>
       </pc:sldChg>
     </pc:docChg>
   </pc:docChgLst>
@@ -3388,7 +3398,7 @@
               </a:lnSpc>
             </a:pPr>
             <a:r>
-              <a:rPr lang="en-US" sz="2400">
+              <a:rPr lang="en-US" sz="2400" dirty="0">
                 <a:solidFill>
                   <a:srgbClr val="E2E6E9"/>
                 </a:solidFill>
@@ -3768,6 +3778,98 @@
               </a:rPr>
               <a:t>POWER BI</a:t>
             </a:r>
+          </a:p>
+        </p:txBody>
+      </p:sp>
+      <p:sp>
+        <p:nvSpPr>
+          <p:cNvPr id="19" name="TextBox 18">
+            <a:extLst>
+              <a:ext uri="{FF2B5EF4-FFF2-40B4-BE49-F238E27FC236}">
+                <a16:creationId xmlns:a16="http://schemas.microsoft.com/office/drawing/2014/main" id="{12FAE6BB-41E7-3A17-F80C-50200757230E}"/>
+              </a:ext>
+            </a:extLst>
+          </p:cNvPr>
+          <p:cNvSpPr txBox="1"/>
+          <p:nvPr/>
+        </p:nvSpPr>
+        <p:spPr>
+          <a:xfrm>
+            <a:off x="11607356" y="7886700"/>
+            <a:ext cx="3078661" cy="923330"/>
+          </a:xfrm>
+          <a:prstGeom prst="rect">
+            <a:avLst/>
+          </a:prstGeom>
+          <a:noFill/>
+        </p:spPr>
+        <p:txBody>
+          <a:bodyPr wrap="square" rtlCol="0">
+            <a:spAutoFit/>
+          </a:bodyPr>
+          <a:lstStyle/>
+          <a:p>
+            <a:r>
+              <a:rPr lang="en-US" sz="2200" dirty="0">
+                <a:solidFill>
+                  <a:schemeClr val="bg1"/>
+                </a:solidFill>
+                <a:latin typeface="Merriweather" panose="00000500000000000000" pitchFamily="2" charset="0"/>
+              </a:rPr>
+              <a:t>Presented By</a:t>
+            </a:r>
+            <a:r>
+              <a:rPr lang="en-US" sz="2000" dirty="0">
+                <a:solidFill>
+                  <a:schemeClr val="bg1"/>
+                </a:solidFill>
+                <a:latin typeface="Merriweather" panose="00000500000000000000" pitchFamily="2" charset="0"/>
+              </a:rPr>
+              <a:t> </a:t>
+            </a:r>
+            <a:r>
+              <a:rPr lang="en-US" sz="800" dirty="0">
+                <a:solidFill>
+                  <a:schemeClr val="bg1"/>
+                </a:solidFill>
+                <a:latin typeface="Merriweather" panose="00000500000000000000" pitchFamily="2" charset="0"/>
+              </a:rPr>
+              <a:t>     </a:t>
+            </a:r>
+          </a:p>
+          <a:p>
+            <a:r>
+              <a:rPr lang="en-US" sz="800" dirty="0">
+                <a:solidFill>
+                  <a:schemeClr val="bg1"/>
+                </a:solidFill>
+                <a:latin typeface="Merriweather" panose="00000500000000000000" pitchFamily="2" charset="0"/>
+              </a:rPr>
+              <a:t> </a:t>
+            </a:r>
+            <a:br>
+              <a:rPr lang="en-US" sz="2400" dirty="0">
+                <a:solidFill>
+                  <a:schemeClr val="bg1"/>
+                </a:solidFill>
+                <a:latin typeface="Merriweather" panose="00000500000000000000" pitchFamily="2" charset="0"/>
+              </a:rPr>
+            </a:br>
+            <a:r>
+              <a:rPr lang="en-US" sz="2400" dirty="0">
+                <a:solidFill>
+                  <a:schemeClr val="bg1"/>
+                </a:solidFill>
+                <a:latin typeface="Merriweather" panose="00000500000000000000" pitchFamily="2" charset="0"/>
+              </a:rPr>
+              <a:t>Rudra Pathade</a:t>
+            </a:r>
+            <a:endParaRPr lang="en-IN" sz="2400" dirty="0">
+              <a:solidFill>
+                <a:schemeClr val="bg1"/>
+              </a:solidFill>
+              <a:latin typeface="Merriweather" panose="00000500000000000000" pitchFamily="2" charset="0"/>
+            </a:endParaRPr>
           </a:p>
         </p:txBody>
       </p:sp>
